--- a/drift_ai.pptx
+++ b/drift_ai.pptx
@@ -6549,12 +6549,59 @@
                 <a:ea typeface="Calibri" pitchFamily="34" charset="-122"/>
                 <a:cs typeface="Calibri" pitchFamily="34" charset="-120"/>
               </a:rPr>
-              <a:t>Got user interest results of 3 people. Positive interest in privacy and behavior insight.</a:t>
+              <a:t>Got user interest results of 3 people from different backgrounds (finance, tech, product engineering). Positive interest in privacy and behavior insight.</a:t>
             </a:r>
             <a:endParaRPr lang="en-US" sz="1200" dirty="0"/>
           </a:p>
         </p:txBody>
       </p:sp>
+      <p:pic>
+        <p:nvPicPr>
+          <p:cNvPr id="1026" name="Picture 2" descr="Forms response chart. Question title: Would you pay $1 to unlock/export a private report like this from your own data?. Number of responses: 3 responses.">
+            <a:extLst>
+              <a:ext uri="{FF2B5EF4-FFF2-40B4-BE49-F238E27FC236}">
+                <a16:creationId xmlns:a16="http://schemas.microsoft.com/office/drawing/2014/main" id="{AE927206-CA24-D5D0-9D44-59129F3C319F}"/>
+              </a:ext>
+            </a:extLst>
+          </p:cNvPr>
+          <p:cNvPicPr>
+            <a:picLocks noChangeAspect="1" noChangeArrowheads="1"/>
+          </p:cNvPicPr>
+          <p:nvPr/>
+        </p:nvPicPr>
+        <p:blipFill>
+          <a:blip r:embed="rId6">
+            <a:extLst>
+              <a:ext uri="{28A0092B-C50C-407E-A947-70E740481C1C}">
+                <a14:useLocalDpi xmlns:a14="http://schemas.microsoft.com/office/drawing/2010/main" val="0"/>
+              </a:ext>
+            </a:extLst>
+          </a:blip>
+          <a:srcRect/>
+          <a:stretch>
+            <a:fillRect/>
+          </a:stretch>
+        </p:blipFill>
+        <p:spPr bwMode="auto">
+          <a:xfrm>
+            <a:off x="4518264" y="2971800"/>
+            <a:ext cx="4434838" cy="1956460"/>
+          </a:xfrm>
+          <a:prstGeom prst="rect">
+            <a:avLst/>
+          </a:prstGeom>
+          <a:noFill/>
+          <a:extLst>
+            <a:ext uri="{909E8E84-426E-40DD-AFC4-6F175D3DCCD1}">
+              <a14:hiddenFill xmlns:a14="http://schemas.microsoft.com/office/drawing/2010/main">
+                <a:solidFill>
+                  <a:srgbClr val="FFFFFF"/>
+                </a:solidFill>
+              </a14:hiddenFill>
+            </a:ext>
+          </a:extLst>
+        </p:spPr>
+      </p:pic>
     </p:spTree>
   </p:cSld>
   <p:clrMapOvr>
